--- a/programming/python/02-informatics/slides/python-informatics.pptx
+++ b/programming/python/02-informatics/slides/python-informatics.pptx
@@ -8469,43 +8469,7 @@
                 </a:solidFill>
                 <a:latin typeface="Helvetica Neue"/>
               </a:rPr>
-              <a:t>What do </a:t>
-            </a:r>
-            <a:r>
-              <a:rPr sz="2070" i="0" b="1">
-                <a:solidFill>
-                  <a:srgbClr val="0F7490"/>
-                </a:solidFill>
-                <a:latin typeface="Menlo"/>
-              </a:rPr>
-              <a:t>find</a:t>
-            </a:r>
-            <a:r>
-              <a:rPr sz="2300" i="0" b="1">
-                <a:solidFill>
-                  <a:srgbClr val="FFFFFF"/>
-                </a:solidFill>
-                <a:latin typeface="Helvetica Neue"/>
-              </a:rPr>
-              <a:t> and </a:t>
-            </a:r>
-            <a:r>
-              <a:rPr sz="2070" i="0" b="1">
-                <a:solidFill>
-                  <a:srgbClr val="0F7490"/>
-                </a:solidFill>
-                <a:latin typeface="Menlo"/>
-              </a:rPr>
-              <a:t>findall</a:t>
-            </a:r>
-            <a:r>
-              <a:rPr sz="2300" i="0" b="1">
-                <a:solidFill>
-                  <a:srgbClr val="FFFFFF"/>
-                </a:solidFill>
-                <a:latin typeface="Helvetica Neue"/>
-              </a:rPr>
-              <a:t> return in ElementTree?</a:t>
+              <a:t>What do find and findall return in ElementTree?</a:t>
             </a:r>
           </a:p>
         </p:txBody>
@@ -10876,7 +10840,7 @@
                 </a:solidFill>
                 <a:latin typeface="Helvetica Neue"/>
               </a:rPr>
-              <a:t> — Check the status</a:t>
+              <a:t> — Check the status, then parse the JSON</a:t>
             </a:r>
           </a:p>
         </p:txBody>
@@ -13142,25 +13106,7 @@
                 </a:solidFill>
                 <a:latin typeface="Helvetica Neue"/>
               </a:rPr>
-              <a:t>What is </a:t>
-            </a:r>
-            <a:r>
-              <a:rPr sz="2520" i="0" b="1">
-                <a:solidFill>
-                  <a:srgbClr val="0F7490"/>
-                </a:solidFill>
-                <a:latin typeface="Menlo"/>
-              </a:rPr>
-              <a:t>self</a:t>
-            </a:r>
-            <a:r>
-              <a:rPr sz="2800" i="0" b="1">
-                <a:solidFill>
-                  <a:srgbClr val="FFFFFF"/>
-                </a:solidFill>
-                <a:latin typeface="Helvetica Neue"/>
-              </a:rPr>
-              <a:t>?</a:t>
+              <a:t>What is self?</a:t>
             </a:r>
           </a:p>
         </p:txBody>
@@ -20493,13 +20439,13 @@
               </a:lnSpc>
             </a:pPr>
             <a:r>
-              <a:rPr sz="1600" i="0" b="1">
+              <a:rPr sz="1500" i="0" b="1">
                 <a:solidFill>
                   <a:srgbClr val="1E3A5F"/>
                 </a:solidFill>
                 <a:latin typeface="Helvetica Neue"/>
               </a:rPr>
-              <a:t>Every web API is text over a socket. Regex extracts from messy text, and parsers handle formats.</a:t>
+              <a:t>An HTTP/1.1 exchange is text over a socket. Regex extracts from messy text, and parsers handle formats.</a:t>
             </a:r>
           </a:p>
         </p:txBody>
@@ -20582,7 +20528,7 @@
                 </a:solidFill>
                 <a:latin typeface="Helvetica Neue"/>
               </a:rPr>
-              <a:t>Mostly text. HTTP is text over a socket, and what comes back has to be picked apart before you can use it.</a:t>
+              <a:t>Mostly text. HTTP/1.1 is text over a socket, and what comes back has to be picked apart before you can use it.</a:t>
             </a:r>
           </a:p>
         </p:txBody>
@@ -21915,25 +21861,7 @@
                 </a:solidFill>
                 <a:latin typeface="Helvetica Neue"/>
               </a:rPr>
-              <a:t>What does </a:t>
-            </a:r>
-            <a:r>
-              <a:rPr sz="1800" i="0" b="1">
-                <a:solidFill>
-                  <a:srgbClr val="0F7490"/>
-                </a:solidFill>
-                <a:latin typeface="Menlo"/>
-              </a:rPr>
-              <a:t>re.findall</a:t>
-            </a:r>
-            <a:r>
-              <a:rPr sz="2000" i="0" b="1">
-                <a:solidFill>
-                  <a:srgbClr val="FFFFFF"/>
-                </a:solidFill>
-                <a:latin typeface="Helvetica Neue"/>
-              </a:rPr>
-              <a:t> return if the pattern has a group?</a:t>
+              <a:t>What does re.findall return if the pattern has a group?</a:t>
             </a:r>
           </a:p>
         </p:txBody>
@@ -22671,34 +22599,7 @@
                 </a:solidFill>
                 <a:latin typeface="Helvetica Neue"/>
               </a:rPr>
-              <a:t>What is the difference between </a:t>
-            </a:r>
-            <a:r>
-              <a:rPr sz="2430" i="0" b="1">
-                <a:solidFill>
-                  <a:srgbClr val="0F7490"/>
-                </a:solidFill>
-                <a:latin typeface="Menlo"/>
-              </a:rPr>
-              <a:t>.+</a:t>
-            </a:r>
-            <a:r>
-              <a:rPr sz="2700" i="0" b="1">
-                <a:solidFill>
-                  <a:srgbClr val="FFFFFF"/>
-                </a:solidFill>
-                <a:latin typeface="Helvetica Neue"/>
-              </a:rPr>
-              <a:t> and </a:t>
-            </a:r>
-            <a:r>
-              <a:rPr sz="2430" i="0" b="1">
-                <a:solidFill>
-                  <a:srgbClr val="0F7490"/>
-                </a:solidFill>
-                <a:latin typeface="Menlo"/>
-              </a:rPr>
-              <a:t>.+?</a:t>
+              <a:t>What is the difference between .+ and .+?</a:t>
             </a:r>
           </a:p>
         </p:txBody>
